--- a/docs/paper/flapsim_paper_figures.pptx
+++ b/docs/paper/flapsim_paper_figures.pptx
@@ -6521,7 +6521,7 @@
         <p:spPr>
           <a:xfrm>
             <a:off x="457200" y="822960"/>
-            <a:ext cx="11247120" cy="5319583"/>
+            <a:ext cx="9913797" cy="5760720"/>
           </a:xfrm>
           <a:prstGeom prst="rect">
             <a:avLst/>

--- a/docs/paper/flapsim_paper_figures.pptx
+++ b/docs/paper/flapsim_paper_figures.pptx
@@ -6521,7 +6521,7 @@
         <p:spPr>
           <a:xfrm>
             <a:off x="457200" y="822960"/>
-            <a:ext cx="9913797" cy="5760720"/>
+            <a:ext cx="11247120" cy="5623560"/>
           </a:xfrm>
           <a:prstGeom prst="rect">
             <a:avLst/>

--- a/docs/paper/flapsim_paper_figures.pptx
+++ b/docs/paper/flapsim_paper_figures.pptx
@@ -4853,7 +4853,7 @@
         <p:spPr>
           <a:xfrm>
             <a:off x="457200" y="822960"/>
-            <a:ext cx="7976381" cy="5760720"/>
+            <a:ext cx="7151238" cy="5760720"/>
           </a:xfrm>
           <a:prstGeom prst="rect">
             <a:avLst/>
